--- a/inst/simulations/simulation-2/annotate.pptx
+++ b/inst/simulations/simulation-2/annotate.pptx
@@ -2,12 +2,12 @@
 <file path=ppt/presentation.xml><?xml version="1.0" encoding="utf-8"?>
 <p:presentation xmlns:a="http://schemas.openxmlformats.org/drawingml/2006/main" xmlns:r="http://schemas.openxmlformats.org/officeDocument/2006/relationships" xmlns:p="http://schemas.openxmlformats.org/presentationml/2006/main" saveSubsetFonts="1" autoCompressPictures="0">
   <p:sldMasterIdLst>
-    <p:sldMasterId id="2147483696" r:id="rId1"/>
+    <p:sldMasterId id="2147483756" r:id="rId1"/>
   </p:sldMasterIdLst>
   <p:sldIdLst>
     <p:sldId id="256" r:id="rId2"/>
   </p:sldIdLst>
-  <p:sldSz cx="12801600" cy="4572000"/>
+  <p:sldSz cx="9144000" cy="5257800"/>
   <p:notesSz cx="6858000" cy="9144000"/>
   <p:defaultTextStyle>
     <a:defPPr>
@@ -141,15 +141,15 @@
         </p:nvSpPr>
         <p:spPr>
           <a:xfrm>
-            <a:off x="1600200" y="748242"/>
-            <a:ext cx="9601200" cy="1591733"/>
+            <a:off x="1143000" y="860478"/>
+            <a:ext cx="6858000" cy="1830493"/>
           </a:xfrm>
         </p:spPr>
         <p:txBody>
           <a:bodyPr anchor="b"/>
           <a:lstStyle>
             <a:lvl1pPr algn="ctr">
-              <a:defRPr sz="4000"/>
+              <a:defRPr sz="4500"/>
             </a:lvl1pPr>
           </a:lstStyle>
           <a:p>
@@ -173,8 +173,8 @@
         </p:nvSpPr>
         <p:spPr>
           <a:xfrm>
-            <a:off x="1600200" y="2401359"/>
-            <a:ext cx="9601200" cy="1103841"/>
+            <a:off x="1143000" y="2761562"/>
+            <a:ext cx="6858000" cy="1269418"/>
           </a:xfrm>
         </p:spPr>
         <p:txBody>
@@ -182,39 +182,39 @@
           <a:lstStyle>
             <a:lvl1pPr marL="0" indent="0" algn="ctr">
               <a:buNone/>
-              <a:defRPr sz="1600"/>
+              <a:defRPr sz="1800"/>
             </a:lvl1pPr>
-            <a:lvl2pPr marL="304815" indent="0" algn="ctr">
-              <a:buNone/>
-              <a:defRPr sz="1333"/>
+            <a:lvl2pPr marL="342900" indent="0" algn="ctr">
+              <a:buNone/>
+              <a:defRPr sz="1500"/>
             </a:lvl2pPr>
-            <a:lvl3pPr marL="609630" indent="0" algn="ctr">
+            <a:lvl3pPr marL="685800" indent="0" algn="ctr">
+              <a:buNone/>
+              <a:defRPr sz="1350"/>
+            </a:lvl3pPr>
+            <a:lvl4pPr marL="1028700" indent="0" algn="ctr">
               <a:buNone/>
               <a:defRPr sz="1200"/>
-            </a:lvl3pPr>
-            <a:lvl4pPr marL="914446" indent="0" algn="ctr">
-              <a:buNone/>
-              <a:defRPr sz="1067"/>
             </a:lvl4pPr>
-            <a:lvl5pPr marL="1219261" indent="0" algn="ctr">
-              <a:buNone/>
-              <a:defRPr sz="1067"/>
+            <a:lvl5pPr marL="1371600" indent="0" algn="ctr">
+              <a:buNone/>
+              <a:defRPr sz="1200"/>
             </a:lvl5pPr>
-            <a:lvl6pPr marL="1524076" indent="0" algn="ctr">
-              <a:buNone/>
-              <a:defRPr sz="1067"/>
+            <a:lvl6pPr marL="1714500" indent="0" algn="ctr">
+              <a:buNone/>
+              <a:defRPr sz="1200"/>
             </a:lvl6pPr>
-            <a:lvl7pPr marL="1828891" indent="0" algn="ctr">
-              <a:buNone/>
-              <a:defRPr sz="1067"/>
+            <a:lvl7pPr marL="2057400" indent="0" algn="ctr">
+              <a:buNone/>
+              <a:defRPr sz="1200"/>
             </a:lvl7pPr>
-            <a:lvl8pPr marL="2133707" indent="0" algn="ctr">
-              <a:buNone/>
-              <a:defRPr sz="1067"/>
+            <a:lvl8pPr marL="2400300" indent="0" algn="ctr">
+              <a:buNone/>
+              <a:defRPr sz="1200"/>
             </a:lvl8pPr>
-            <a:lvl9pPr marL="2438522" indent="0" algn="ctr">
-              <a:buNone/>
-              <a:defRPr sz="1067"/>
+            <a:lvl9pPr marL="2743200" indent="0" algn="ctr">
+              <a:buNone/>
+              <a:defRPr sz="1200"/>
             </a:lvl9pPr>
           </a:lstStyle>
           <a:p>
@@ -243,7 +243,7 @@
           <a:p>
             <a:fld id="{4D96E356-BA57-4FD4-A615-821C48ECCF5A}" type="datetimeFigureOut">
               <a:rPr lang="en-US" smtClean="0"/>
-              <a:t>3/20/2026</a:t>
+              <a:t>4/9/2026</a:t>
             </a:fld>
             <a:endParaRPr lang="en-US"/>
           </a:p>
@@ -294,7 +294,7 @@
     </p:spTree>
     <p:extLst>
       <p:ext uri="{BB962C8B-B14F-4D97-AF65-F5344CB8AC3E}">
-        <p14:creationId xmlns:p14="http://schemas.microsoft.com/office/powerpoint/2010/main" val="2502010237"/>
+        <p14:creationId xmlns:p14="http://schemas.microsoft.com/office/powerpoint/2010/main" val="1840872476"/>
       </p:ext>
     </p:extLst>
   </p:cSld>
@@ -413,7 +413,7 @@
           <a:p>
             <a:fld id="{4D96E356-BA57-4FD4-A615-821C48ECCF5A}" type="datetimeFigureOut">
               <a:rPr lang="en-US" smtClean="0"/>
-              <a:t>3/20/2026</a:t>
+              <a:t>4/9/2026</a:t>
             </a:fld>
             <a:endParaRPr lang="en-US"/>
           </a:p>
@@ -464,7 +464,7 @@
     </p:spTree>
     <p:extLst>
       <p:ext uri="{BB962C8B-B14F-4D97-AF65-F5344CB8AC3E}">
-        <p14:creationId xmlns:p14="http://schemas.microsoft.com/office/powerpoint/2010/main" val="738304822"/>
+        <p14:creationId xmlns:p14="http://schemas.microsoft.com/office/powerpoint/2010/main" val="1175723304"/>
       </p:ext>
     </p:extLst>
   </p:cSld>
@@ -503,8 +503,8 @@
         </p:nvSpPr>
         <p:spPr>
           <a:xfrm>
-            <a:off x="9161145" y="243419"/>
-            <a:ext cx="2760346" cy="3874559"/>
+            <a:off x="6543675" y="279929"/>
+            <a:ext cx="1971675" cy="4455742"/>
           </a:xfrm>
         </p:spPr>
         <p:txBody>
@@ -531,8 +531,8 @@
         </p:nvSpPr>
         <p:spPr>
           <a:xfrm>
-            <a:off x="880110" y="243419"/>
-            <a:ext cx="8121016" cy="3874559"/>
+            <a:off x="628650" y="279929"/>
+            <a:ext cx="5800725" cy="4455742"/>
           </a:xfrm>
         </p:spPr>
         <p:txBody>
@@ -593,7 +593,7 @@
           <a:p>
             <a:fld id="{4D96E356-BA57-4FD4-A615-821C48ECCF5A}" type="datetimeFigureOut">
               <a:rPr lang="en-US" smtClean="0"/>
-              <a:t>3/20/2026</a:t>
+              <a:t>4/9/2026</a:t>
             </a:fld>
             <a:endParaRPr lang="en-US"/>
           </a:p>
@@ -644,7 +644,7 @@
     </p:spTree>
     <p:extLst>
       <p:ext uri="{BB962C8B-B14F-4D97-AF65-F5344CB8AC3E}">
-        <p14:creationId xmlns:p14="http://schemas.microsoft.com/office/powerpoint/2010/main" val="2841709077"/>
+        <p14:creationId xmlns:p14="http://schemas.microsoft.com/office/powerpoint/2010/main" val="2755186663"/>
       </p:ext>
     </p:extLst>
   </p:cSld>
@@ -763,7 +763,7 @@
           <a:p>
             <a:fld id="{4D96E356-BA57-4FD4-A615-821C48ECCF5A}" type="datetimeFigureOut">
               <a:rPr lang="en-US" smtClean="0"/>
-              <a:t>3/20/2026</a:t>
+              <a:t>4/9/2026</a:t>
             </a:fld>
             <a:endParaRPr lang="en-US"/>
           </a:p>
@@ -814,7 +814,7 @@
     </p:spTree>
     <p:extLst>
       <p:ext uri="{BB962C8B-B14F-4D97-AF65-F5344CB8AC3E}">
-        <p14:creationId xmlns:p14="http://schemas.microsoft.com/office/powerpoint/2010/main" val="1832314473"/>
+        <p14:creationId xmlns:p14="http://schemas.microsoft.com/office/powerpoint/2010/main" val="1145833998"/>
       </p:ext>
     </p:extLst>
   </p:cSld>
@@ -853,15 +853,15 @@
         </p:nvSpPr>
         <p:spPr>
           <a:xfrm>
-            <a:off x="873443" y="1139828"/>
-            <a:ext cx="11041380" cy="1901825"/>
+            <a:off x="623888" y="1310800"/>
+            <a:ext cx="7886700" cy="2187098"/>
           </a:xfrm>
         </p:spPr>
         <p:txBody>
           <a:bodyPr anchor="b"/>
           <a:lstStyle>
             <a:lvl1pPr>
-              <a:defRPr sz="4000"/>
+              <a:defRPr sz="4500"/>
             </a:lvl1pPr>
           </a:lstStyle>
           <a:p>
@@ -885,8 +885,8 @@
         </p:nvSpPr>
         <p:spPr>
           <a:xfrm>
-            <a:off x="873443" y="3059644"/>
-            <a:ext cx="11041380" cy="1000125"/>
+            <a:off x="623888" y="3518589"/>
+            <a:ext cx="7886700" cy="1150143"/>
           </a:xfrm>
         </p:spPr>
         <p:txBody>
@@ -894,7 +894,7 @@
           <a:lstStyle>
             <a:lvl1pPr marL="0" indent="0">
               <a:buNone/>
-              <a:defRPr sz="1600">
+              <a:defRPr sz="1800">
                 <a:solidFill>
                   <a:schemeClr val="tx1">
                     <a:tint val="82000"/>
@@ -902,9 +902,9 @@
                 </a:solidFill>
               </a:defRPr>
             </a:lvl1pPr>
-            <a:lvl2pPr marL="304815" indent="0">
-              <a:buNone/>
-              <a:defRPr sz="1333">
+            <a:lvl2pPr marL="342900" indent="0">
+              <a:buNone/>
+              <a:defRPr sz="1500">
                 <a:solidFill>
                   <a:schemeClr val="tx1">
                     <a:tint val="82000"/>
@@ -912,7 +912,17 @@
                 </a:solidFill>
               </a:defRPr>
             </a:lvl2pPr>
-            <a:lvl3pPr marL="609630" indent="0">
+            <a:lvl3pPr marL="685800" indent="0">
+              <a:buNone/>
+              <a:defRPr sz="1350">
+                <a:solidFill>
+                  <a:schemeClr val="tx1">
+                    <a:tint val="82000"/>
+                  </a:schemeClr>
+                </a:solidFill>
+              </a:defRPr>
+            </a:lvl3pPr>
+            <a:lvl4pPr marL="1028700" indent="0">
               <a:buNone/>
               <a:defRPr sz="1200">
                 <a:solidFill>
@@ -921,20 +931,10 @@
                   </a:schemeClr>
                 </a:solidFill>
               </a:defRPr>
-            </a:lvl3pPr>
-            <a:lvl4pPr marL="914446" indent="0">
-              <a:buNone/>
-              <a:defRPr sz="1067">
-                <a:solidFill>
-                  <a:schemeClr val="tx1">
-                    <a:tint val="82000"/>
-                  </a:schemeClr>
-                </a:solidFill>
-              </a:defRPr>
             </a:lvl4pPr>
-            <a:lvl5pPr marL="1219261" indent="0">
-              <a:buNone/>
-              <a:defRPr sz="1067">
+            <a:lvl5pPr marL="1371600" indent="0">
+              <a:buNone/>
+              <a:defRPr sz="1200">
                 <a:solidFill>
                   <a:schemeClr val="tx1">
                     <a:tint val="82000"/>
@@ -942,9 +942,9 @@
                 </a:solidFill>
               </a:defRPr>
             </a:lvl5pPr>
-            <a:lvl6pPr marL="1524076" indent="0">
-              <a:buNone/>
-              <a:defRPr sz="1067">
+            <a:lvl6pPr marL="1714500" indent="0">
+              <a:buNone/>
+              <a:defRPr sz="1200">
                 <a:solidFill>
                   <a:schemeClr val="tx1">
                     <a:tint val="82000"/>
@@ -952,9 +952,9 @@
                 </a:solidFill>
               </a:defRPr>
             </a:lvl6pPr>
-            <a:lvl7pPr marL="1828891" indent="0">
-              <a:buNone/>
-              <a:defRPr sz="1067">
+            <a:lvl7pPr marL="2057400" indent="0">
+              <a:buNone/>
+              <a:defRPr sz="1200">
                 <a:solidFill>
                   <a:schemeClr val="tx1">
                     <a:tint val="82000"/>
@@ -962,9 +962,9 @@
                 </a:solidFill>
               </a:defRPr>
             </a:lvl7pPr>
-            <a:lvl8pPr marL="2133707" indent="0">
-              <a:buNone/>
-              <a:defRPr sz="1067">
+            <a:lvl8pPr marL="2400300" indent="0">
+              <a:buNone/>
+              <a:defRPr sz="1200">
                 <a:solidFill>
                   <a:schemeClr val="tx1">
                     <a:tint val="82000"/>
@@ -972,9 +972,9 @@
                 </a:solidFill>
               </a:defRPr>
             </a:lvl8pPr>
-            <a:lvl9pPr marL="2438522" indent="0">
-              <a:buNone/>
-              <a:defRPr sz="1067">
+            <a:lvl9pPr marL="2743200" indent="0">
+              <a:buNone/>
+              <a:defRPr sz="1200">
                 <a:solidFill>
                   <a:schemeClr val="tx1">
                     <a:tint val="82000"/>
@@ -1009,7 +1009,7 @@
           <a:p>
             <a:fld id="{4D96E356-BA57-4FD4-A615-821C48ECCF5A}" type="datetimeFigureOut">
               <a:rPr lang="en-US" smtClean="0"/>
-              <a:t>3/20/2026</a:t>
+              <a:t>4/9/2026</a:t>
             </a:fld>
             <a:endParaRPr lang="en-US"/>
           </a:p>
@@ -1060,7 +1060,7 @@
     </p:spTree>
     <p:extLst>
       <p:ext uri="{BB962C8B-B14F-4D97-AF65-F5344CB8AC3E}">
-        <p14:creationId xmlns:p14="http://schemas.microsoft.com/office/powerpoint/2010/main" val="1753871955"/>
+        <p14:creationId xmlns:p14="http://schemas.microsoft.com/office/powerpoint/2010/main" val="3489587522"/>
       </p:ext>
     </p:extLst>
   </p:cSld>
@@ -1122,8 +1122,8 @@
         </p:nvSpPr>
         <p:spPr>
           <a:xfrm>
-            <a:off x="880110" y="1217083"/>
-            <a:ext cx="5440680" cy="2900892"/>
+            <a:off x="628650" y="1399646"/>
+            <a:ext cx="3886200" cy="3336026"/>
           </a:xfrm>
         </p:spPr>
         <p:txBody>
@@ -1179,8 +1179,8 @@
         </p:nvSpPr>
         <p:spPr>
           <a:xfrm>
-            <a:off x="6480810" y="1217083"/>
-            <a:ext cx="5440680" cy="2900892"/>
+            <a:off x="4629150" y="1399646"/>
+            <a:ext cx="3886200" cy="3336026"/>
           </a:xfrm>
         </p:spPr>
         <p:txBody>
@@ -1241,7 +1241,7 @@
           <a:p>
             <a:fld id="{4D96E356-BA57-4FD4-A615-821C48ECCF5A}" type="datetimeFigureOut">
               <a:rPr lang="en-US" smtClean="0"/>
-              <a:t>3/20/2026</a:t>
+              <a:t>4/9/2026</a:t>
             </a:fld>
             <a:endParaRPr lang="en-US"/>
           </a:p>
@@ -1292,7 +1292,7 @@
     </p:spTree>
     <p:extLst>
       <p:ext uri="{BB962C8B-B14F-4D97-AF65-F5344CB8AC3E}">
-        <p14:creationId xmlns:p14="http://schemas.microsoft.com/office/powerpoint/2010/main" val="3940024043"/>
+        <p14:creationId xmlns:p14="http://schemas.microsoft.com/office/powerpoint/2010/main" val="893275887"/>
       </p:ext>
     </p:extLst>
   </p:cSld>
@@ -1331,8 +1331,8 @@
         </p:nvSpPr>
         <p:spPr>
           <a:xfrm>
-            <a:off x="881777" y="243419"/>
-            <a:ext cx="11041380" cy="883709"/>
+            <a:off x="629841" y="279930"/>
+            <a:ext cx="7886700" cy="1016265"/>
           </a:xfrm>
         </p:spPr>
         <p:txBody>
@@ -1359,8 +1359,8 @@
         </p:nvSpPr>
         <p:spPr>
           <a:xfrm>
-            <a:off x="881778" y="1120777"/>
-            <a:ext cx="5415676" cy="549275"/>
+            <a:off x="629842" y="1288892"/>
+            <a:ext cx="3868340" cy="631666"/>
           </a:xfrm>
         </p:spPr>
         <p:txBody>
@@ -1368,39 +1368,39 @@
           <a:lstStyle>
             <a:lvl1pPr marL="0" indent="0">
               <a:buNone/>
-              <a:defRPr sz="1600" b="1"/>
+              <a:defRPr sz="1800" b="1"/>
             </a:lvl1pPr>
-            <a:lvl2pPr marL="304815" indent="0">
-              <a:buNone/>
-              <a:defRPr sz="1333" b="1"/>
+            <a:lvl2pPr marL="342900" indent="0">
+              <a:buNone/>
+              <a:defRPr sz="1500" b="1"/>
             </a:lvl2pPr>
-            <a:lvl3pPr marL="609630" indent="0">
+            <a:lvl3pPr marL="685800" indent="0">
+              <a:buNone/>
+              <a:defRPr sz="1350" b="1"/>
+            </a:lvl3pPr>
+            <a:lvl4pPr marL="1028700" indent="0">
               <a:buNone/>
               <a:defRPr sz="1200" b="1"/>
-            </a:lvl3pPr>
-            <a:lvl4pPr marL="914446" indent="0">
-              <a:buNone/>
-              <a:defRPr sz="1067" b="1"/>
             </a:lvl4pPr>
-            <a:lvl5pPr marL="1219261" indent="0">
-              <a:buNone/>
-              <a:defRPr sz="1067" b="1"/>
+            <a:lvl5pPr marL="1371600" indent="0">
+              <a:buNone/>
+              <a:defRPr sz="1200" b="1"/>
             </a:lvl5pPr>
-            <a:lvl6pPr marL="1524076" indent="0">
-              <a:buNone/>
-              <a:defRPr sz="1067" b="1"/>
+            <a:lvl6pPr marL="1714500" indent="0">
+              <a:buNone/>
+              <a:defRPr sz="1200" b="1"/>
             </a:lvl6pPr>
-            <a:lvl7pPr marL="1828891" indent="0">
-              <a:buNone/>
-              <a:defRPr sz="1067" b="1"/>
+            <a:lvl7pPr marL="2057400" indent="0">
+              <a:buNone/>
+              <a:defRPr sz="1200" b="1"/>
             </a:lvl7pPr>
-            <a:lvl8pPr marL="2133707" indent="0">
-              <a:buNone/>
-              <a:defRPr sz="1067" b="1"/>
+            <a:lvl8pPr marL="2400300" indent="0">
+              <a:buNone/>
+              <a:defRPr sz="1200" b="1"/>
             </a:lvl8pPr>
-            <a:lvl9pPr marL="2438522" indent="0">
-              <a:buNone/>
-              <a:defRPr sz="1067" b="1"/>
+            <a:lvl9pPr marL="2743200" indent="0">
+              <a:buNone/>
+              <a:defRPr sz="1200" b="1"/>
             </a:lvl9pPr>
           </a:lstStyle>
           <a:p>
@@ -1424,8 +1424,8 @@
         </p:nvSpPr>
         <p:spPr>
           <a:xfrm>
-            <a:off x="881778" y="1670050"/>
-            <a:ext cx="5415676" cy="2456392"/>
+            <a:off x="629842" y="1920557"/>
+            <a:ext cx="3868340" cy="2824851"/>
           </a:xfrm>
         </p:spPr>
         <p:txBody>
@@ -1481,8 +1481,8 @@
         </p:nvSpPr>
         <p:spPr>
           <a:xfrm>
-            <a:off x="6480810" y="1120777"/>
-            <a:ext cx="5442347" cy="549275"/>
+            <a:off x="4629150" y="1288892"/>
+            <a:ext cx="3887391" cy="631666"/>
           </a:xfrm>
         </p:spPr>
         <p:txBody>
@@ -1490,39 +1490,39 @@
           <a:lstStyle>
             <a:lvl1pPr marL="0" indent="0">
               <a:buNone/>
-              <a:defRPr sz="1600" b="1"/>
+              <a:defRPr sz="1800" b="1"/>
             </a:lvl1pPr>
-            <a:lvl2pPr marL="304815" indent="0">
-              <a:buNone/>
-              <a:defRPr sz="1333" b="1"/>
+            <a:lvl2pPr marL="342900" indent="0">
+              <a:buNone/>
+              <a:defRPr sz="1500" b="1"/>
             </a:lvl2pPr>
-            <a:lvl3pPr marL="609630" indent="0">
+            <a:lvl3pPr marL="685800" indent="0">
+              <a:buNone/>
+              <a:defRPr sz="1350" b="1"/>
+            </a:lvl3pPr>
+            <a:lvl4pPr marL="1028700" indent="0">
               <a:buNone/>
               <a:defRPr sz="1200" b="1"/>
-            </a:lvl3pPr>
-            <a:lvl4pPr marL="914446" indent="0">
-              <a:buNone/>
-              <a:defRPr sz="1067" b="1"/>
             </a:lvl4pPr>
-            <a:lvl5pPr marL="1219261" indent="0">
-              <a:buNone/>
-              <a:defRPr sz="1067" b="1"/>
+            <a:lvl5pPr marL="1371600" indent="0">
+              <a:buNone/>
+              <a:defRPr sz="1200" b="1"/>
             </a:lvl5pPr>
-            <a:lvl6pPr marL="1524076" indent="0">
-              <a:buNone/>
-              <a:defRPr sz="1067" b="1"/>
+            <a:lvl6pPr marL="1714500" indent="0">
+              <a:buNone/>
+              <a:defRPr sz="1200" b="1"/>
             </a:lvl6pPr>
-            <a:lvl7pPr marL="1828891" indent="0">
-              <a:buNone/>
-              <a:defRPr sz="1067" b="1"/>
+            <a:lvl7pPr marL="2057400" indent="0">
+              <a:buNone/>
+              <a:defRPr sz="1200" b="1"/>
             </a:lvl7pPr>
-            <a:lvl8pPr marL="2133707" indent="0">
-              <a:buNone/>
-              <a:defRPr sz="1067" b="1"/>
+            <a:lvl8pPr marL="2400300" indent="0">
+              <a:buNone/>
+              <a:defRPr sz="1200" b="1"/>
             </a:lvl8pPr>
-            <a:lvl9pPr marL="2438522" indent="0">
-              <a:buNone/>
-              <a:defRPr sz="1067" b="1"/>
+            <a:lvl9pPr marL="2743200" indent="0">
+              <a:buNone/>
+              <a:defRPr sz="1200" b="1"/>
             </a:lvl9pPr>
           </a:lstStyle>
           <a:p>
@@ -1546,8 +1546,8 @@
         </p:nvSpPr>
         <p:spPr>
           <a:xfrm>
-            <a:off x="6480810" y="1670050"/>
-            <a:ext cx="5442347" cy="2456392"/>
+            <a:off x="4629150" y="1920557"/>
+            <a:ext cx="3887391" cy="2824851"/>
           </a:xfrm>
         </p:spPr>
         <p:txBody>
@@ -1608,7 +1608,7 @@
           <a:p>
             <a:fld id="{4D96E356-BA57-4FD4-A615-821C48ECCF5A}" type="datetimeFigureOut">
               <a:rPr lang="en-US" smtClean="0"/>
-              <a:t>3/20/2026</a:t>
+              <a:t>4/9/2026</a:t>
             </a:fld>
             <a:endParaRPr lang="en-US"/>
           </a:p>
@@ -1659,7 +1659,7 @@
     </p:spTree>
     <p:extLst>
       <p:ext uri="{BB962C8B-B14F-4D97-AF65-F5344CB8AC3E}">
-        <p14:creationId xmlns:p14="http://schemas.microsoft.com/office/powerpoint/2010/main" val="2164563158"/>
+        <p14:creationId xmlns:p14="http://schemas.microsoft.com/office/powerpoint/2010/main" val="4133664243"/>
       </p:ext>
     </p:extLst>
   </p:cSld>
@@ -1726,7 +1726,7 @@
           <a:p>
             <a:fld id="{4D96E356-BA57-4FD4-A615-821C48ECCF5A}" type="datetimeFigureOut">
               <a:rPr lang="en-US" smtClean="0"/>
-              <a:t>3/20/2026</a:t>
+              <a:t>4/9/2026</a:t>
             </a:fld>
             <a:endParaRPr lang="en-US"/>
           </a:p>
@@ -1777,7 +1777,7 @@
     </p:spTree>
     <p:extLst>
       <p:ext uri="{BB962C8B-B14F-4D97-AF65-F5344CB8AC3E}">
-        <p14:creationId xmlns:p14="http://schemas.microsoft.com/office/powerpoint/2010/main" val="2677368569"/>
+        <p14:creationId xmlns:p14="http://schemas.microsoft.com/office/powerpoint/2010/main" val="190661796"/>
       </p:ext>
     </p:extLst>
   </p:cSld>
@@ -1821,7 +1821,7 @@
           <a:p>
             <a:fld id="{4D96E356-BA57-4FD4-A615-821C48ECCF5A}" type="datetimeFigureOut">
               <a:rPr lang="en-US" smtClean="0"/>
-              <a:t>3/20/2026</a:t>
+              <a:t>4/9/2026</a:t>
             </a:fld>
             <a:endParaRPr lang="en-US"/>
           </a:p>
@@ -1872,7 +1872,7 @@
     </p:spTree>
     <p:extLst>
       <p:ext uri="{BB962C8B-B14F-4D97-AF65-F5344CB8AC3E}">
-        <p14:creationId xmlns:p14="http://schemas.microsoft.com/office/powerpoint/2010/main" val="2502541921"/>
+        <p14:creationId xmlns:p14="http://schemas.microsoft.com/office/powerpoint/2010/main" val="745108604"/>
       </p:ext>
     </p:extLst>
   </p:cSld>
@@ -1911,15 +1911,15 @@
         </p:nvSpPr>
         <p:spPr>
           <a:xfrm>
-            <a:off x="881779" y="304800"/>
-            <a:ext cx="4128849" cy="1066800"/>
+            <a:off x="629841" y="350520"/>
+            <a:ext cx="2949178" cy="1226820"/>
           </a:xfrm>
         </p:spPr>
         <p:txBody>
           <a:bodyPr anchor="b"/>
           <a:lstStyle>
             <a:lvl1pPr>
-              <a:defRPr sz="2133"/>
+              <a:defRPr sz="2400"/>
             </a:lvl1pPr>
           </a:lstStyle>
           <a:p>
@@ -1943,39 +1943,39 @@
         </p:nvSpPr>
         <p:spPr>
           <a:xfrm>
-            <a:off x="5442348" y="658286"/>
-            <a:ext cx="6480810" cy="3249083"/>
+            <a:off x="3887391" y="757026"/>
+            <a:ext cx="4629150" cy="3736446"/>
           </a:xfrm>
         </p:spPr>
         <p:txBody>
           <a:bodyPr/>
           <a:lstStyle>
             <a:lvl1pPr>
-              <a:defRPr sz="2133"/>
+              <a:defRPr sz="2400"/>
             </a:lvl1pPr>
             <a:lvl2pPr>
-              <a:defRPr sz="1867"/>
+              <a:defRPr sz="2100"/>
             </a:lvl2pPr>
             <a:lvl3pPr>
-              <a:defRPr sz="1600"/>
+              <a:defRPr sz="1800"/>
             </a:lvl3pPr>
             <a:lvl4pPr>
-              <a:defRPr sz="1333"/>
+              <a:defRPr sz="1500"/>
             </a:lvl4pPr>
             <a:lvl5pPr>
-              <a:defRPr sz="1333"/>
+              <a:defRPr sz="1500"/>
             </a:lvl5pPr>
             <a:lvl6pPr>
-              <a:defRPr sz="1333"/>
+              <a:defRPr sz="1500"/>
             </a:lvl6pPr>
             <a:lvl7pPr>
-              <a:defRPr sz="1333"/>
+              <a:defRPr sz="1500"/>
             </a:lvl7pPr>
             <a:lvl8pPr>
-              <a:defRPr sz="1333"/>
+              <a:defRPr sz="1500"/>
             </a:lvl8pPr>
             <a:lvl9pPr>
-              <a:defRPr sz="1333"/>
+              <a:defRPr sz="1500"/>
             </a:lvl9pPr>
           </a:lstStyle>
           <a:p>
@@ -2028,8 +2028,8 @@
         </p:nvSpPr>
         <p:spPr>
           <a:xfrm>
-            <a:off x="881779" y="1371602"/>
-            <a:ext cx="4128849" cy="2541059"/>
+            <a:off x="629841" y="1577340"/>
+            <a:ext cx="2949178" cy="2922217"/>
           </a:xfrm>
         </p:spPr>
         <p:txBody>
@@ -2037,39 +2037,39 @@
           <a:lstStyle>
             <a:lvl1pPr marL="0" indent="0">
               <a:buNone/>
-              <a:defRPr sz="1067"/>
+              <a:defRPr sz="1200"/>
             </a:lvl1pPr>
-            <a:lvl2pPr marL="304815" indent="0">
-              <a:buNone/>
-              <a:defRPr sz="933"/>
+            <a:lvl2pPr marL="342900" indent="0">
+              <a:buNone/>
+              <a:defRPr sz="1050"/>
             </a:lvl2pPr>
-            <a:lvl3pPr marL="609630" indent="0">
-              <a:buNone/>
-              <a:defRPr sz="800"/>
+            <a:lvl3pPr marL="685800" indent="0">
+              <a:buNone/>
+              <a:defRPr sz="900"/>
             </a:lvl3pPr>
-            <a:lvl4pPr marL="914446" indent="0">
-              <a:buNone/>
-              <a:defRPr sz="667"/>
+            <a:lvl4pPr marL="1028700" indent="0">
+              <a:buNone/>
+              <a:defRPr sz="750"/>
             </a:lvl4pPr>
-            <a:lvl5pPr marL="1219261" indent="0">
-              <a:buNone/>
-              <a:defRPr sz="667"/>
+            <a:lvl5pPr marL="1371600" indent="0">
+              <a:buNone/>
+              <a:defRPr sz="750"/>
             </a:lvl5pPr>
-            <a:lvl6pPr marL="1524076" indent="0">
-              <a:buNone/>
-              <a:defRPr sz="667"/>
+            <a:lvl6pPr marL="1714500" indent="0">
+              <a:buNone/>
+              <a:defRPr sz="750"/>
             </a:lvl6pPr>
-            <a:lvl7pPr marL="1828891" indent="0">
-              <a:buNone/>
-              <a:defRPr sz="667"/>
+            <a:lvl7pPr marL="2057400" indent="0">
+              <a:buNone/>
+              <a:defRPr sz="750"/>
             </a:lvl7pPr>
-            <a:lvl8pPr marL="2133707" indent="0">
-              <a:buNone/>
-              <a:defRPr sz="667"/>
+            <a:lvl8pPr marL="2400300" indent="0">
+              <a:buNone/>
+              <a:defRPr sz="750"/>
             </a:lvl8pPr>
-            <a:lvl9pPr marL="2438522" indent="0">
-              <a:buNone/>
-              <a:defRPr sz="667"/>
+            <a:lvl9pPr marL="2743200" indent="0">
+              <a:buNone/>
+              <a:defRPr sz="750"/>
             </a:lvl9pPr>
           </a:lstStyle>
           <a:p>
@@ -2098,7 +2098,7 @@
           <a:p>
             <a:fld id="{4D96E356-BA57-4FD4-A615-821C48ECCF5A}" type="datetimeFigureOut">
               <a:rPr lang="en-US" smtClean="0"/>
-              <a:t>3/20/2026</a:t>
+              <a:t>4/9/2026</a:t>
             </a:fld>
             <a:endParaRPr lang="en-US"/>
           </a:p>
@@ -2149,7 +2149,7 @@
     </p:spTree>
     <p:extLst>
       <p:ext uri="{BB962C8B-B14F-4D97-AF65-F5344CB8AC3E}">
-        <p14:creationId xmlns:p14="http://schemas.microsoft.com/office/powerpoint/2010/main" val="2544255171"/>
+        <p14:creationId xmlns:p14="http://schemas.microsoft.com/office/powerpoint/2010/main" val="2433088453"/>
       </p:ext>
     </p:extLst>
   </p:cSld>
@@ -2188,15 +2188,15 @@
         </p:nvSpPr>
         <p:spPr>
           <a:xfrm>
-            <a:off x="881779" y="304800"/>
-            <a:ext cx="4128849" cy="1066800"/>
+            <a:off x="629841" y="350520"/>
+            <a:ext cx="2949178" cy="1226820"/>
           </a:xfrm>
         </p:spPr>
         <p:txBody>
           <a:bodyPr anchor="b"/>
           <a:lstStyle>
             <a:lvl1pPr>
-              <a:defRPr sz="2133"/>
+              <a:defRPr sz="2400"/>
             </a:lvl1pPr>
           </a:lstStyle>
           <a:p>
@@ -2220,8 +2220,8 @@
         </p:nvSpPr>
         <p:spPr>
           <a:xfrm>
-            <a:off x="5442348" y="658286"/>
-            <a:ext cx="6480810" cy="3249083"/>
+            <a:off x="3887391" y="757026"/>
+            <a:ext cx="4629150" cy="3736446"/>
           </a:xfrm>
         </p:spPr>
         <p:txBody>
@@ -2229,39 +2229,39 @@
           <a:lstStyle>
             <a:lvl1pPr marL="0" indent="0">
               <a:buNone/>
-              <a:defRPr sz="2133"/>
+              <a:defRPr sz="2400"/>
             </a:lvl1pPr>
-            <a:lvl2pPr marL="304815" indent="0">
-              <a:buNone/>
-              <a:defRPr sz="1867"/>
+            <a:lvl2pPr marL="342900" indent="0">
+              <a:buNone/>
+              <a:defRPr sz="2100"/>
             </a:lvl2pPr>
-            <a:lvl3pPr marL="609630" indent="0">
-              <a:buNone/>
-              <a:defRPr sz="1600"/>
+            <a:lvl3pPr marL="685800" indent="0">
+              <a:buNone/>
+              <a:defRPr sz="1800"/>
             </a:lvl3pPr>
-            <a:lvl4pPr marL="914446" indent="0">
-              <a:buNone/>
-              <a:defRPr sz="1333"/>
+            <a:lvl4pPr marL="1028700" indent="0">
+              <a:buNone/>
+              <a:defRPr sz="1500"/>
             </a:lvl4pPr>
-            <a:lvl5pPr marL="1219261" indent="0">
-              <a:buNone/>
-              <a:defRPr sz="1333"/>
+            <a:lvl5pPr marL="1371600" indent="0">
+              <a:buNone/>
+              <a:defRPr sz="1500"/>
             </a:lvl5pPr>
-            <a:lvl6pPr marL="1524076" indent="0">
-              <a:buNone/>
-              <a:defRPr sz="1333"/>
+            <a:lvl6pPr marL="1714500" indent="0">
+              <a:buNone/>
+              <a:defRPr sz="1500"/>
             </a:lvl6pPr>
-            <a:lvl7pPr marL="1828891" indent="0">
-              <a:buNone/>
-              <a:defRPr sz="1333"/>
+            <a:lvl7pPr marL="2057400" indent="0">
+              <a:buNone/>
+              <a:defRPr sz="1500"/>
             </a:lvl7pPr>
-            <a:lvl8pPr marL="2133707" indent="0">
-              <a:buNone/>
-              <a:defRPr sz="1333"/>
+            <a:lvl8pPr marL="2400300" indent="0">
+              <a:buNone/>
+              <a:defRPr sz="1500"/>
             </a:lvl8pPr>
-            <a:lvl9pPr marL="2438522" indent="0">
-              <a:buNone/>
-              <a:defRPr sz="1333"/>
+            <a:lvl9pPr marL="2743200" indent="0">
+              <a:buNone/>
+              <a:defRPr sz="1500"/>
             </a:lvl9pPr>
           </a:lstStyle>
           <a:p>
@@ -2285,8 +2285,8 @@
         </p:nvSpPr>
         <p:spPr>
           <a:xfrm>
-            <a:off x="881779" y="1371602"/>
-            <a:ext cx="4128849" cy="2541059"/>
+            <a:off x="629841" y="1577340"/>
+            <a:ext cx="2949178" cy="2922217"/>
           </a:xfrm>
         </p:spPr>
         <p:txBody>
@@ -2294,39 +2294,39 @@
           <a:lstStyle>
             <a:lvl1pPr marL="0" indent="0">
               <a:buNone/>
-              <a:defRPr sz="1067"/>
+              <a:defRPr sz="1200"/>
             </a:lvl1pPr>
-            <a:lvl2pPr marL="304815" indent="0">
-              <a:buNone/>
-              <a:defRPr sz="933"/>
+            <a:lvl2pPr marL="342900" indent="0">
+              <a:buNone/>
+              <a:defRPr sz="1050"/>
             </a:lvl2pPr>
-            <a:lvl3pPr marL="609630" indent="0">
-              <a:buNone/>
-              <a:defRPr sz="800"/>
+            <a:lvl3pPr marL="685800" indent="0">
+              <a:buNone/>
+              <a:defRPr sz="900"/>
             </a:lvl3pPr>
-            <a:lvl4pPr marL="914446" indent="0">
-              <a:buNone/>
-              <a:defRPr sz="667"/>
+            <a:lvl4pPr marL="1028700" indent="0">
+              <a:buNone/>
+              <a:defRPr sz="750"/>
             </a:lvl4pPr>
-            <a:lvl5pPr marL="1219261" indent="0">
-              <a:buNone/>
-              <a:defRPr sz="667"/>
+            <a:lvl5pPr marL="1371600" indent="0">
+              <a:buNone/>
+              <a:defRPr sz="750"/>
             </a:lvl5pPr>
-            <a:lvl6pPr marL="1524076" indent="0">
-              <a:buNone/>
-              <a:defRPr sz="667"/>
+            <a:lvl6pPr marL="1714500" indent="0">
+              <a:buNone/>
+              <a:defRPr sz="750"/>
             </a:lvl6pPr>
-            <a:lvl7pPr marL="1828891" indent="0">
-              <a:buNone/>
-              <a:defRPr sz="667"/>
+            <a:lvl7pPr marL="2057400" indent="0">
+              <a:buNone/>
+              <a:defRPr sz="750"/>
             </a:lvl7pPr>
-            <a:lvl8pPr marL="2133707" indent="0">
-              <a:buNone/>
-              <a:defRPr sz="667"/>
+            <a:lvl8pPr marL="2400300" indent="0">
+              <a:buNone/>
+              <a:defRPr sz="750"/>
             </a:lvl8pPr>
-            <a:lvl9pPr marL="2438522" indent="0">
-              <a:buNone/>
-              <a:defRPr sz="667"/>
+            <a:lvl9pPr marL="2743200" indent="0">
+              <a:buNone/>
+              <a:defRPr sz="750"/>
             </a:lvl9pPr>
           </a:lstStyle>
           <a:p>
@@ -2355,7 +2355,7 @@
           <a:p>
             <a:fld id="{4D96E356-BA57-4FD4-A615-821C48ECCF5A}" type="datetimeFigureOut">
               <a:rPr lang="en-US" smtClean="0"/>
-              <a:t>3/20/2026</a:t>
+              <a:t>4/9/2026</a:t>
             </a:fld>
             <a:endParaRPr lang="en-US"/>
           </a:p>
@@ -2406,7 +2406,7 @@
     </p:spTree>
     <p:extLst>
       <p:ext uri="{BB962C8B-B14F-4D97-AF65-F5344CB8AC3E}">
-        <p14:creationId xmlns:p14="http://schemas.microsoft.com/office/powerpoint/2010/main" val="138559861"/>
+        <p14:creationId xmlns:p14="http://schemas.microsoft.com/office/powerpoint/2010/main" val="330011333"/>
       </p:ext>
     </p:extLst>
   </p:cSld>
@@ -2450,8 +2450,8 @@
         </p:nvSpPr>
         <p:spPr>
           <a:xfrm>
-            <a:off x="880110" y="243419"/>
-            <a:ext cx="11041380" cy="883709"/>
+            <a:off x="628650" y="279930"/>
+            <a:ext cx="7886700" cy="1016265"/>
           </a:xfrm>
           <a:prstGeom prst="rect">
             <a:avLst/>
@@ -2483,8 +2483,8 @@
         </p:nvSpPr>
         <p:spPr>
           <a:xfrm>
-            <a:off x="880110" y="1217083"/>
-            <a:ext cx="11041380" cy="2900892"/>
+            <a:off x="628650" y="1399646"/>
+            <a:ext cx="7886700" cy="3336026"/>
           </a:xfrm>
           <a:prstGeom prst="rect">
             <a:avLst/>
@@ -2545,8 +2545,8 @@
         </p:nvSpPr>
         <p:spPr>
           <a:xfrm>
-            <a:off x="880110" y="4237569"/>
-            <a:ext cx="2880360" cy="243417"/>
+            <a:off x="628650" y="4873202"/>
+            <a:ext cx="2057400" cy="279929"/>
           </a:xfrm>
           <a:prstGeom prst="rect">
             <a:avLst/>
@@ -2556,7 +2556,7 @@
           <a:bodyPr vert="horz" lIns="91440" tIns="45720" rIns="91440" bIns="45720" rtlCol="0" anchor="ctr"/>
           <a:lstStyle>
             <a:lvl1pPr algn="l">
-              <a:defRPr sz="800">
+              <a:defRPr sz="900">
                 <a:solidFill>
                   <a:schemeClr val="tx1">
                     <a:tint val="82000"/>
@@ -2568,7 +2568,7 @@
           <a:p>
             <a:fld id="{4D96E356-BA57-4FD4-A615-821C48ECCF5A}" type="datetimeFigureOut">
               <a:rPr lang="en-US" smtClean="0"/>
-              <a:t>3/20/2026</a:t>
+              <a:t>4/9/2026</a:t>
             </a:fld>
             <a:endParaRPr lang="en-US"/>
           </a:p>
@@ -2586,8 +2586,8 @@
         </p:nvSpPr>
         <p:spPr>
           <a:xfrm>
-            <a:off x="4240530" y="4237569"/>
-            <a:ext cx="4320540" cy="243417"/>
+            <a:off x="3028950" y="4873202"/>
+            <a:ext cx="3086100" cy="279929"/>
           </a:xfrm>
           <a:prstGeom prst="rect">
             <a:avLst/>
@@ -2597,7 +2597,7 @@
           <a:bodyPr vert="horz" lIns="91440" tIns="45720" rIns="91440" bIns="45720" rtlCol="0" anchor="ctr"/>
           <a:lstStyle>
             <a:lvl1pPr algn="ctr">
-              <a:defRPr sz="800">
+              <a:defRPr sz="900">
                 <a:solidFill>
                   <a:schemeClr val="tx1">
                     <a:tint val="82000"/>
@@ -2623,8 +2623,8 @@
         </p:nvSpPr>
         <p:spPr>
           <a:xfrm>
-            <a:off x="9041130" y="4237569"/>
-            <a:ext cx="2880360" cy="243417"/>
+            <a:off x="6457950" y="4873202"/>
+            <a:ext cx="2057400" cy="279929"/>
           </a:xfrm>
           <a:prstGeom prst="rect">
             <a:avLst/>
@@ -2634,7 +2634,7 @@
           <a:bodyPr vert="horz" lIns="91440" tIns="45720" rIns="91440" bIns="45720" rtlCol="0" anchor="ctr"/>
           <a:lstStyle>
             <a:lvl1pPr algn="r">
-              <a:defRPr sz="800">
+              <a:defRPr sz="900">
                 <a:solidFill>
                   <a:schemeClr val="tx1">
                     <a:tint val="82000"/>
@@ -2655,27 +2655,27 @@
     </p:spTree>
     <p:extLst>
       <p:ext uri="{BB962C8B-B14F-4D97-AF65-F5344CB8AC3E}">
-        <p14:creationId xmlns:p14="http://schemas.microsoft.com/office/powerpoint/2010/main" val="1493369817"/>
+        <p14:creationId xmlns:p14="http://schemas.microsoft.com/office/powerpoint/2010/main" val="36501987"/>
       </p:ext>
     </p:extLst>
   </p:cSld>
   <p:clrMap bg1="lt1" tx1="dk1" bg2="lt2" tx2="dk2" accent1="accent1" accent2="accent2" accent3="accent3" accent4="accent4" accent5="accent5" accent6="accent6" hlink="hlink" folHlink="folHlink"/>
   <p:sldLayoutIdLst>
-    <p:sldLayoutId id="2147483697" r:id="rId1"/>
-    <p:sldLayoutId id="2147483698" r:id="rId2"/>
-    <p:sldLayoutId id="2147483699" r:id="rId3"/>
-    <p:sldLayoutId id="2147483700" r:id="rId4"/>
-    <p:sldLayoutId id="2147483701" r:id="rId5"/>
-    <p:sldLayoutId id="2147483702" r:id="rId6"/>
-    <p:sldLayoutId id="2147483703" r:id="rId7"/>
-    <p:sldLayoutId id="2147483704" r:id="rId8"/>
-    <p:sldLayoutId id="2147483705" r:id="rId9"/>
-    <p:sldLayoutId id="2147483706" r:id="rId10"/>
-    <p:sldLayoutId id="2147483707" r:id="rId11"/>
+    <p:sldLayoutId id="2147483757" r:id="rId1"/>
+    <p:sldLayoutId id="2147483758" r:id="rId2"/>
+    <p:sldLayoutId id="2147483759" r:id="rId3"/>
+    <p:sldLayoutId id="2147483760" r:id="rId4"/>
+    <p:sldLayoutId id="2147483761" r:id="rId5"/>
+    <p:sldLayoutId id="2147483762" r:id="rId6"/>
+    <p:sldLayoutId id="2147483763" r:id="rId7"/>
+    <p:sldLayoutId id="2147483764" r:id="rId8"/>
+    <p:sldLayoutId id="2147483765" r:id="rId9"/>
+    <p:sldLayoutId id="2147483766" r:id="rId10"/>
+    <p:sldLayoutId id="2147483767" r:id="rId11"/>
   </p:sldLayoutIdLst>
   <p:txStyles>
     <p:titleStyle>
-      <a:lvl1pPr algn="l" defTabSz="609630" rtl="0" eaLnBrk="1" latinLnBrk="0" hangingPunct="1">
+      <a:lvl1pPr algn="l" defTabSz="685800" rtl="0" eaLnBrk="1" latinLnBrk="0" hangingPunct="1">
         <a:lnSpc>
           <a:spcPct val="90000"/>
         </a:lnSpc>
@@ -2683,7 +2683,7 @@
           <a:spcPct val="0"/>
         </a:spcBef>
         <a:buNone/>
-        <a:defRPr sz="2933" kern="1200">
+        <a:defRPr sz="3300" kern="1200">
           <a:solidFill>
             <a:schemeClr val="tx1"/>
           </a:solidFill>
@@ -2694,16 +2694,16 @@
       </a:lvl1pPr>
     </p:titleStyle>
     <p:bodyStyle>
-      <a:lvl1pPr marL="152408" indent="-152408" algn="l" defTabSz="609630" rtl="0" eaLnBrk="1" latinLnBrk="0" hangingPunct="1">
+      <a:lvl1pPr marL="171450" indent="-171450" algn="l" defTabSz="685800" rtl="0" eaLnBrk="1" latinLnBrk="0" hangingPunct="1">
         <a:lnSpc>
           <a:spcPct val="90000"/>
         </a:lnSpc>
         <a:spcBef>
-          <a:spcPts val="667"/>
+          <a:spcPts val="750"/>
         </a:spcBef>
         <a:buFont typeface="Arial" panose="020B0604020202020204" pitchFamily="34" charset="0"/>
         <a:buChar char="•"/>
-        <a:defRPr sz="1867" kern="1200">
+        <a:defRPr sz="2100" kern="1200">
           <a:solidFill>
             <a:schemeClr val="tx1"/>
           </a:solidFill>
@@ -2712,16 +2712,16 @@
           <a:cs typeface="+mn-cs"/>
         </a:defRPr>
       </a:lvl1pPr>
-      <a:lvl2pPr marL="457223" indent="-152408" algn="l" defTabSz="609630" rtl="0" eaLnBrk="1" latinLnBrk="0" hangingPunct="1">
+      <a:lvl2pPr marL="514350" indent="-171450" algn="l" defTabSz="685800" rtl="0" eaLnBrk="1" latinLnBrk="0" hangingPunct="1">
         <a:lnSpc>
           <a:spcPct val="90000"/>
         </a:lnSpc>
         <a:spcBef>
-          <a:spcPts val="333"/>
+          <a:spcPts val="375"/>
         </a:spcBef>
         <a:buFont typeface="Arial" panose="020B0604020202020204" pitchFamily="34" charset="0"/>
         <a:buChar char="•"/>
-        <a:defRPr sz="1600" kern="1200">
+        <a:defRPr sz="1800" kern="1200">
           <a:solidFill>
             <a:schemeClr val="tx1"/>
           </a:solidFill>
@@ -2730,16 +2730,16 @@
           <a:cs typeface="+mn-cs"/>
         </a:defRPr>
       </a:lvl2pPr>
-      <a:lvl3pPr marL="762038" indent="-152408" algn="l" defTabSz="609630" rtl="0" eaLnBrk="1" latinLnBrk="0" hangingPunct="1">
+      <a:lvl3pPr marL="857250" indent="-171450" algn="l" defTabSz="685800" rtl="0" eaLnBrk="1" latinLnBrk="0" hangingPunct="1">
         <a:lnSpc>
           <a:spcPct val="90000"/>
         </a:lnSpc>
         <a:spcBef>
-          <a:spcPts val="333"/>
+          <a:spcPts val="375"/>
         </a:spcBef>
         <a:buFont typeface="Arial" panose="020B0604020202020204" pitchFamily="34" charset="0"/>
         <a:buChar char="•"/>
-        <a:defRPr sz="1333" kern="1200">
+        <a:defRPr sz="1500" kern="1200">
           <a:solidFill>
             <a:schemeClr val="tx1"/>
           </a:solidFill>
@@ -2748,16 +2748,16 @@
           <a:cs typeface="+mn-cs"/>
         </a:defRPr>
       </a:lvl3pPr>
-      <a:lvl4pPr marL="1066853" indent="-152408" algn="l" defTabSz="609630" rtl="0" eaLnBrk="1" latinLnBrk="0" hangingPunct="1">
+      <a:lvl4pPr marL="1200150" indent="-171450" algn="l" defTabSz="685800" rtl="0" eaLnBrk="1" latinLnBrk="0" hangingPunct="1">
         <a:lnSpc>
           <a:spcPct val="90000"/>
         </a:lnSpc>
         <a:spcBef>
-          <a:spcPts val="333"/>
+          <a:spcPts val="375"/>
         </a:spcBef>
         <a:buFont typeface="Arial" panose="020B0604020202020204" pitchFamily="34" charset="0"/>
         <a:buChar char="•"/>
-        <a:defRPr sz="1200" kern="1200">
+        <a:defRPr sz="1350" kern="1200">
           <a:solidFill>
             <a:schemeClr val="tx1"/>
           </a:solidFill>
@@ -2766,16 +2766,16 @@
           <a:cs typeface="+mn-cs"/>
         </a:defRPr>
       </a:lvl4pPr>
-      <a:lvl5pPr marL="1371669" indent="-152408" algn="l" defTabSz="609630" rtl="0" eaLnBrk="1" latinLnBrk="0" hangingPunct="1">
+      <a:lvl5pPr marL="1543050" indent="-171450" algn="l" defTabSz="685800" rtl="0" eaLnBrk="1" latinLnBrk="0" hangingPunct="1">
         <a:lnSpc>
           <a:spcPct val="90000"/>
         </a:lnSpc>
         <a:spcBef>
-          <a:spcPts val="333"/>
+          <a:spcPts val="375"/>
         </a:spcBef>
         <a:buFont typeface="Arial" panose="020B0604020202020204" pitchFamily="34" charset="0"/>
         <a:buChar char="•"/>
-        <a:defRPr sz="1200" kern="1200">
+        <a:defRPr sz="1350" kern="1200">
           <a:solidFill>
             <a:schemeClr val="tx1"/>
           </a:solidFill>
@@ -2784,16 +2784,16 @@
           <a:cs typeface="+mn-cs"/>
         </a:defRPr>
       </a:lvl5pPr>
-      <a:lvl6pPr marL="1676484" indent="-152408" algn="l" defTabSz="609630" rtl="0" eaLnBrk="1" latinLnBrk="0" hangingPunct="1">
+      <a:lvl6pPr marL="1885950" indent="-171450" algn="l" defTabSz="685800" rtl="0" eaLnBrk="1" latinLnBrk="0" hangingPunct="1">
         <a:lnSpc>
           <a:spcPct val="90000"/>
         </a:lnSpc>
         <a:spcBef>
-          <a:spcPts val="333"/>
+          <a:spcPts val="375"/>
         </a:spcBef>
         <a:buFont typeface="Arial" panose="020B0604020202020204" pitchFamily="34" charset="0"/>
         <a:buChar char="•"/>
-        <a:defRPr sz="1200" kern="1200">
+        <a:defRPr sz="1350" kern="1200">
           <a:solidFill>
             <a:schemeClr val="tx1"/>
           </a:solidFill>
@@ -2802,16 +2802,16 @@
           <a:cs typeface="+mn-cs"/>
         </a:defRPr>
       </a:lvl6pPr>
-      <a:lvl7pPr marL="1981299" indent="-152408" algn="l" defTabSz="609630" rtl="0" eaLnBrk="1" latinLnBrk="0" hangingPunct="1">
+      <a:lvl7pPr marL="2228850" indent="-171450" algn="l" defTabSz="685800" rtl="0" eaLnBrk="1" latinLnBrk="0" hangingPunct="1">
         <a:lnSpc>
           <a:spcPct val="90000"/>
         </a:lnSpc>
         <a:spcBef>
-          <a:spcPts val="333"/>
+          <a:spcPts val="375"/>
         </a:spcBef>
         <a:buFont typeface="Arial" panose="020B0604020202020204" pitchFamily="34" charset="0"/>
         <a:buChar char="•"/>
-        <a:defRPr sz="1200" kern="1200">
+        <a:defRPr sz="1350" kern="1200">
           <a:solidFill>
             <a:schemeClr val="tx1"/>
           </a:solidFill>
@@ -2820,16 +2820,16 @@
           <a:cs typeface="+mn-cs"/>
         </a:defRPr>
       </a:lvl7pPr>
-      <a:lvl8pPr marL="2286114" indent="-152408" algn="l" defTabSz="609630" rtl="0" eaLnBrk="1" latinLnBrk="0" hangingPunct="1">
+      <a:lvl8pPr marL="2571750" indent="-171450" algn="l" defTabSz="685800" rtl="0" eaLnBrk="1" latinLnBrk="0" hangingPunct="1">
         <a:lnSpc>
           <a:spcPct val="90000"/>
         </a:lnSpc>
         <a:spcBef>
-          <a:spcPts val="333"/>
+          <a:spcPts val="375"/>
         </a:spcBef>
         <a:buFont typeface="Arial" panose="020B0604020202020204" pitchFamily="34" charset="0"/>
         <a:buChar char="•"/>
-        <a:defRPr sz="1200" kern="1200">
+        <a:defRPr sz="1350" kern="1200">
           <a:solidFill>
             <a:schemeClr val="tx1"/>
           </a:solidFill>
@@ -2838,16 +2838,16 @@
           <a:cs typeface="+mn-cs"/>
         </a:defRPr>
       </a:lvl8pPr>
-      <a:lvl9pPr marL="2590930" indent="-152408" algn="l" defTabSz="609630" rtl="0" eaLnBrk="1" latinLnBrk="0" hangingPunct="1">
+      <a:lvl9pPr marL="2914650" indent="-171450" algn="l" defTabSz="685800" rtl="0" eaLnBrk="1" latinLnBrk="0" hangingPunct="1">
         <a:lnSpc>
           <a:spcPct val="90000"/>
         </a:lnSpc>
         <a:spcBef>
-          <a:spcPts val="333"/>
+          <a:spcPts val="375"/>
         </a:spcBef>
         <a:buFont typeface="Arial" panose="020B0604020202020204" pitchFamily="34" charset="0"/>
         <a:buChar char="•"/>
-        <a:defRPr sz="1200" kern="1200">
+        <a:defRPr sz="1350" kern="1200">
           <a:solidFill>
             <a:schemeClr val="tx1"/>
           </a:solidFill>
@@ -2861,8 +2861,8 @@
       <a:defPPr>
         <a:defRPr lang="en-US"/>
       </a:defPPr>
-      <a:lvl1pPr marL="0" algn="l" defTabSz="609630" rtl="0" eaLnBrk="1" latinLnBrk="0" hangingPunct="1">
-        <a:defRPr sz="1200" kern="1200">
+      <a:lvl1pPr marL="0" algn="l" defTabSz="685800" rtl="0" eaLnBrk="1" latinLnBrk="0" hangingPunct="1">
+        <a:defRPr sz="1350" kern="1200">
           <a:solidFill>
             <a:schemeClr val="tx1"/>
           </a:solidFill>
@@ -2871,8 +2871,8 @@
           <a:cs typeface="+mn-cs"/>
         </a:defRPr>
       </a:lvl1pPr>
-      <a:lvl2pPr marL="304815" algn="l" defTabSz="609630" rtl="0" eaLnBrk="1" latinLnBrk="0" hangingPunct="1">
-        <a:defRPr sz="1200" kern="1200">
+      <a:lvl2pPr marL="342900" algn="l" defTabSz="685800" rtl="0" eaLnBrk="1" latinLnBrk="0" hangingPunct="1">
+        <a:defRPr sz="1350" kern="1200">
           <a:solidFill>
             <a:schemeClr val="tx1"/>
           </a:solidFill>
@@ -2881,8 +2881,8 @@
           <a:cs typeface="+mn-cs"/>
         </a:defRPr>
       </a:lvl2pPr>
-      <a:lvl3pPr marL="609630" algn="l" defTabSz="609630" rtl="0" eaLnBrk="1" latinLnBrk="0" hangingPunct="1">
-        <a:defRPr sz="1200" kern="1200">
+      <a:lvl3pPr marL="685800" algn="l" defTabSz="685800" rtl="0" eaLnBrk="1" latinLnBrk="0" hangingPunct="1">
+        <a:defRPr sz="1350" kern="1200">
           <a:solidFill>
             <a:schemeClr val="tx1"/>
           </a:solidFill>
@@ -2891,8 +2891,8 @@
           <a:cs typeface="+mn-cs"/>
         </a:defRPr>
       </a:lvl3pPr>
-      <a:lvl4pPr marL="914446" algn="l" defTabSz="609630" rtl="0" eaLnBrk="1" latinLnBrk="0" hangingPunct="1">
-        <a:defRPr sz="1200" kern="1200">
+      <a:lvl4pPr marL="1028700" algn="l" defTabSz="685800" rtl="0" eaLnBrk="1" latinLnBrk="0" hangingPunct="1">
+        <a:defRPr sz="1350" kern="1200">
           <a:solidFill>
             <a:schemeClr val="tx1"/>
           </a:solidFill>
@@ -2901,8 +2901,8 @@
           <a:cs typeface="+mn-cs"/>
         </a:defRPr>
       </a:lvl4pPr>
-      <a:lvl5pPr marL="1219261" algn="l" defTabSz="609630" rtl="0" eaLnBrk="1" latinLnBrk="0" hangingPunct="1">
-        <a:defRPr sz="1200" kern="1200">
+      <a:lvl5pPr marL="1371600" algn="l" defTabSz="685800" rtl="0" eaLnBrk="1" latinLnBrk="0" hangingPunct="1">
+        <a:defRPr sz="1350" kern="1200">
           <a:solidFill>
             <a:schemeClr val="tx1"/>
           </a:solidFill>
@@ -2911,8 +2911,8 @@
           <a:cs typeface="+mn-cs"/>
         </a:defRPr>
       </a:lvl5pPr>
-      <a:lvl6pPr marL="1524076" algn="l" defTabSz="609630" rtl="0" eaLnBrk="1" latinLnBrk="0" hangingPunct="1">
-        <a:defRPr sz="1200" kern="1200">
+      <a:lvl6pPr marL="1714500" algn="l" defTabSz="685800" rtl="0" eaLnBrk="1" latinLnBrk="0" hangingPunct="1">
+        <a:defRPr sz="1350" kern="1200">
           <a:solidFill>
             <a:schemeClr val="tx1"/>
           </a:solidFill>
@@ -2921,8 +2921,8 @@
           <a:cs typeface="+mn-cs"/>
         </a:defRPr>
       </a:lvl6pPr>
-      <a:lvl7pPr marL="1828891" algn="l" defTabSz="609630" rtl="0" eaLnBrk="1" latinLnBrk="0" hangingPunct="1">
-        <a:defRPr sz="1200" kern="1200">
+      <a:lvl7pPr marL="2057400" algn="l" defTabSz="685800" rtl="0" eaLnBrk="1" latinLnBrk="0" hangingPunct="1">
+        <a:defRPr sz="1350" kern="1200">
           <a:solidFill>
             <a:schemeClr val="tx1"/>
           </a:solidFill>
@@ -2931,8 +2931,8 @@
           <a:cs typeface="+mn-cs"/>
         </a:defRPr>
       </a:lvl7pPr>
-      <a:lvl8pPr marL="2133707" algn="l" defTabSz="609630" rtl="0" eaLnBrk="1" latinLnBrk="0" hangingPunct="1">
-        <a:defRPr sz="1200" kern="1200">
+      <a:lvl8pPr marL="2400300" algn="l" defTabSz="685800" rtl="0" eaLnBrk="1" latinLnBrk="0" hangingPunct="1">
+        <a:defRPr sz="1350" kern="1200">
           <a:solidFill>
             <a:schemeClr val="tx1"/>
           </a:solidFill>
@@ -2941,8 +2941,8 @@
           <a:cs typeface="+mn-cs"/>
         </a:defRPr>
       </a:lvl8pPr>
-      <a:lvl9pPr marL="2438522" algn="l" defTabSz="609630" rtl="0" eaLnBrk="1" latinLnBrk="0" hangingPunct="1">
-        <a:defRPr sz="1200" kern="1200">
+      <a:lvl9pPr marL="2743200" algn="l" defTabSz="685800" rtl="0" eaLnBrk="1" latinLnBrk="0" hangingPunct="1">
+        <a:defRPr sz="1350" kern="1200">
           <a:solidFill>
             <a:schemeClr val="tx1"/>
           </a:solidFill>
@@ -2978,7 +2978,7 @@
           <p:cNvPr id="13" name="Picture 12">
             <a:extLst>
               <a:ext uri="{FF2B5EF4-FFF2-40B4-BE49-F238E27FC236}">
-                <a16:creationId xmlns:a16="http://schemas.microsoft.com/office/drawing/2014/main" id="{68645592-6334-079F-D7F9-B6F0105F9B74}"/>
+                <a16:creationId xmlns:a16="http://schemas.microsoft.com/office/drawing/2014/main" id="{B4135EA8-A78B-C982-FC7F-5CB2B982272C}"/>
               </a:ext>
             </a:extLst>
           </p:cNvPr>
@@ -2995,8 +2995,8 @@
         </p:blipFill>
         <p:spPr>
           <a:xfrm>
-            <a:off x="9329" y="0"/>
-            <a:ext cx="5181601" cy="4572000"/>
+            <a:off x="431074" y="3294955"/>
+            <a:ext cx="7713617" cy="1928404"/>
           </a:xfrm>
           <a:prstGeom prst="rect">
             <a:avLst/>
@@ -3005,10 +3005,10 @@
       </p:pic>
       <p:pic>
         <p:nvPicPr>
-          <p:cNvPr id="15" name="Picture 14">
+          <p:cNvPr id="14" name="Picture 13">
             <a:extLst>
               <a:ext uri="{FF2B5EF4-FFF2-40B4-BE49-F238E27FC236}">
-                <a16:creationId xmlns:a16="http://schemas.microsoft.com/office/drawing/2014/main" id="{D3B5E08D-D700-DE99-B0F5-C7C01E48DB63}"/>
+                <a16:creationId xmlns:a16="http://schemas.microsoft.com/office/drawing/2014/main" id="{B22CA45C-B776-6CC8-AECC-7C8134D657AC}"/>
               </a:ext>
             </a:extLst>
           </p:cNvPr>
@@ -3025,8 +3025,69 @@
         </p:blipFill>
         <p:spPr>
           <a:xfrm>
-            <a:off x="7271101" y="0"/>
-            <a:ext cx="5181601" cy="4572000"/>
+            <a:off x="5367458" y="48987"/>
+            <a:ext cx="3608615" cy="3184072"/>
+          </a:xfrm>
+          <a:prstGeom prst="rect">
+            <a:avLst/>
+          </a:prstGeom>
+        </p:spPr>
+      </p:pic>
+      <p:pic>
+        <p:nvPicPr>
+          <p:cNvPr id="11" name="Picture 10">
+            <a:extLst>
+              <a:ext uri="{FF2B5EF4-FFF2-40B4-BE49-F238E27FC236}">
+                <a16:creationId xmlns:a16="http://schemas.microsoft.com/office/drawing/2014/main" id="{E97D4048-0C1A-A832-8984-4A9C5F976900}"/>
+              </a:ext>
+            </a:extLst>
+          </p:cNvPr>
+          <p:cNvPicPr>
+            <a:picLocks noChangeAspect="1"/>
+          </p:cNvPicPr>
+          <p:nvPr/>
+        </p:nvPicPr>
+        <p:blipFill>
+          <a:blip r:embed="rId4"/>
+          <a:stretch>
+            <a:fillRect/>
+          </a:stretch>
+        </p:blipFill>
+        <p:spPr>
+          <a:xfrm>
+            <a:off x="284122" y="48987"/>
+            <a:ext cx="3608615" cy="3184072"/>
+          </a:xfrm>
+          <a:prstGeom prst="rect">
+            <a:avLst/>
+          </a:prstGeom>
+        </p:spPr>
+      </p:pic>
+      <p:pic>
+        <p:nvPicPr>
+          <p:cNvPr id="8" name="Picture 7">
+            <a:extLst>
+              <a:ext uri="{FF2B5EF4-FFF2-40B4-BE49-F238E27FC236}">
+                <a16:creationId xmlns:a16="http://schemas.microsoft.com/office/drawing/2014/main" id="{F602C37D-B711-C4C8-A889-A8B87FE5A652}"/>
+              </a:ext>
+            </a:extLst>
+          </p:cNvPr>
+          <p:cNvPicPr>
+            <a:picLocks noChangeAspect="1"/>
+          </p:cNvPicPr>
+          <p:nvPr/>
+        </p:nvPicPr>
+        <p:blipFill>
+          <a:blip r:embed="rId5"/>
+          <a:srcRect l="80684" t="33033" b="32249"/>
+          <a:stretch>
+            <a:fillRect/>
+          </a:stretch>
+        </p:blipFill>
+        <p:spPr>
+          <a:xfrm>
+            <a:off x="3999885" y="1149217"/>
+            <a:ext cx="697052" cy="1105416"/>
           </a:xfrm>
           <a:prstGeom prst="rect">
             <a:avLst/>
@@ -3050,8 +3111,8 @@
         </p:nvCxnSpPr>
         <p:spPr>
           <a:xfrm>
-            <a:off x="6908028" y="475965"/>
-            <a:ext cx="1283472" cy="238814"/>
+            <a:off x="5123073" y="394529"/>
+            <a:ext cx="865840" cy="152250"/>
           </a:xfrm>
           <a:prstGeom prst="straightConnector1">
             <a:avLst/>
@@ -3092,8 +3153,8 @@
         </p:nvSpPr>
         <p:spPr>
           <a:xfrm>
-            <a:off x="4259493" y="820143"/>
-            <a:ext cx="3154005" cy="584775"/>
+            <a:off x="3221755" y="620157"/>
+            <a:ext cx="2254143" cy="435504"/>
           </a:xfrm>
           <a:prstGeom prst="rect">
             <a:avLst/>
@@ -3108,49 +3169,49 @@
           <a:p>
             <a:pPr algn="ctr"/>
             <a:r>
-              <a:rPr lang="en-US" sz="1600" dirty="0"/>
+              <a:rPr lang="en-US" sz="1115" dirty="0"/>
               <a:t>A, B colocalized in tumor</a:t>
             </a:r>
           </a:p>
           <a:p>
             <a:r>
-              <a:rPr lang="en-US" sz="1600" dirty="0"/>
+              <a:rPr lang="en-US" sz="1115" dirty="0"/>
               <a:t>(disc kernel radius = </a:t>
             </a:r>
             <a:r>
-              <a:rPr lang="el-GR" sz="1600" dirty="0"/>
+              <a:rPr lang="el-GR" sz="1115" dirty="0"/>
               <a:t>σ</a:t>
             </a:r>
             <a:r>
-              <a:rPr lang="en-US" sz="1600" baseline="-25000" dirty="0"/>
+              <a:rPr lang="en-US" sz="1115" baseline="-25000" dirty="0"/>
               <a:t>B</a:t>
             </a:r>
             <a:r>
-              <a:rPr lang="en-US" sz="1600" dirty="0"/>
+              <a:rPr lang="en-US" sz="1115" dirty="0"/>
               <a:t> or </a:t>
             </a:r>
             <a:r>
-              <a:rPr lang="el-GR" sz="1600" dirty="0"/>
+              <a:rPr lang="el-GR" sz="1115" dirty="0"/>
               <a:t>σ</a:t>
             </a:r>
             <a:r>
-              <a:rPr lang="en-US" sz="1600" baseline="-25000" dirty="0"/>
+              <a:rPr lang="en-US" sz="1115" baseline="-25000" dirty="0"/>
               <a:t>B</a:t>
             </a:r>
             <a:r>
-              <a:rPr lang="en-US" sz="1600" dirty="0"/>
+              <a:rPr lang="en-US" sz="1115" dirty="0"/>
               <a:t> + </a:t>
             </a:r>
             <a:r>
-              <a:rPr lang="el-GR" sz="1600" dirty="0"/>
+              <a:rPr lang="el-GR" sz="1115" dirty="0"/>
               <a:t>δ</a:t>
             </a:r>
             <a:r>
-              <a:rPr lang="en-US" sz="1600" baseline="-25000" dirty="0"/>
+              <a:rPr lang="en-US" sz="1115" baseline="-25000" dirty="0"/>
               <a:t>B</a:t>
             </a:r>
             <a:r>
-              <a:rPr lang="en-US" sz="1600" dirty="0"/>
+              <a:rPr lang="en-US" sz="1115" dirty="0"/>
               <a:t> )</a:t>
             </a:r>
           </a:p>
@@ -3170,8 +3231,8 @@
         </p:nvSpPr>
         <p:spPr>
           <a:xfrm>
-            <a:off x="1313464" y="1594843"/>
-            <a:ext cx="1637414" cy="2346250"/>
+            <a:off x="1198856" y="1159685"/>
+            <a:ext cx="1140343" cy="1633997"/>
           </a:xfrm>
           <a:prstGeom prst="rect">
             <a:avLst/>
@@ -3206,7 +3267,7 @@
           <a:lstStyle/>
           <a:p>
             <a:pPr algn="ctr"/>
-            <a:endParaRPr lang="en-US"/>
+            <a:endParaRPr lang="en-US" sz="1254"/>
           </a:p>
         </p:txBody>
       </p:sp>
@@ -3224,8 +3285,8 @@
         </p:nvSpPr>
         <p:spPr>
           <a:xfrm>
-            <a:off x="8820081" y="1594849"/>
-            <a:ext cx="1998921" cy="1772093"/>
+            <a:off x="6426679" y="1159687"/>
+            <a:ext cx="1392107" cy="1234136"/>
           </a:xfrm>
           <a:prstGeom prst="rect">
             <a:avLst/>
@@ -3260,7 +3321,7 @@
           <a:lstStyle/>
           <a:p>
             <a:pPr algn="ctr"/>
-            <a:endParaRPr lang="en-US"/>
+            <a:endParaRPr lang="en-US" sz="1254"/>
           </a:p>
         </p:txBody>
       </p:sp>
@@ -3278,8 +3339,8 @@
         </p:nvSpPr>
         <p:spPr>
           <a:xfrm>
-            <a:off x="4769109" y="306688"/>
-            <a:ext cx="2138919" cy="338554"/>
+            <a:off x="3577457" y="262570"/>
+            <a:ext cx="1545616" cy="263918"/>
           </a:xfrm>
           <a:prstGeom prst="rect">
             <a:avLst/>
@@ -3294,7 +3355,7 @@
           <a:p>
             <a:pPr algn="ctr"/>
             <a:r>
-              <a:rPr lang="en-US" sz="1600" dirty="0"/>
+              <a:rPr lang="en-US" sz="1115" dirty="0"/>
               <a:t>A, B random in stroma</a:t>
             </a:r>
           </a:p>
@@ -3314,8 +3375,8 @@
         </p:nvSpPr>
         <p:spPr>
           <a:xfrm>
-            <a:off x="4710513" y="3341989"/>
-            <a:ext cx="2349939" cy="584775"/>
+            <a:off x="3537995" y="2376441"/>
+            <a:ext cx="1689885" cy="435504"/>
           </a:xfrm>
           <a:prstGeom prst="rect">
             <a:avLst/>
@@ -3330,26 +3391,26 @@
           <a:p>
             <a:pPr algn="ctr"/>
             <a:r>
-              <a:rPr lang="en-US" sz="1600" dirty="0"/>
+              <a:rPr lang="en-US" sz="1115" dirty="0"/>
               <a:t>A, T colocalized in tumor</a:t>
             </a:r>
           </a:p>
           <a:p>
             <a:pPr algn="ctr"/>
             <a:r>
-              <a:rPr lang="en-US" sz="1600" dirty="0"/>
+              <a:rPr lang="en-US" sz="1115" dirty="0"/>
               <a:t>(disc kernel radius = </a:t>
             </a:r>
             <a:r>
-              <a:rPr lang="el-GR" sz="1600" dirty="0"/>
+              <a:rPr lang="el-GR" sz="1115" dirty="0"/>
               <a:t>σ</a:t>
             </a:r>
             <a:r>
-              <a:rPr lang="en-US" sz="1600" baseline="-25000" dirty="0"/>
+              <a:rPr lang="en-US" sz="1115" baseline="-25000" dirty="0"/>
               <a:t>T</a:t>
             </a:r>
             <a:r>
-              <a:rPr lang="en-US" sz="1600" dirty="0"/>
+              <a:rPr lang="en-US" sz="1115" dirty="0"/>
               <a:t> )</a:t>
             </a:r>
           </a:p>
@@ -3372,8 +3433,8 @@
         </p:nvCxnSpPr>
         <p:spPr>
           <a:xfrm flipH="1">
-            <a:off x="2325983" y="1112531"/>
-            <a:ext cx="1933510" cy="2014966"/>
+            <a:off x="1904002" y="837912"/>
+            <a:ext cx="1317753" cy="1389161"/>
           </a:xfrm>
           <a:prstGeom prst="straightConnector1">
             <a:avLst/>
@@ -3417,8 +3478,8 @@
         </p:nvCxnSpPr>
         <p:spPr>
           <a:xfrm>
-            <a:off x="7413498" y="1112531"/>
-            <a:ext cx="2721102" cy="722179"/>
+            <a:off x="5475895" y="837912"/>
+            <a:ext cx="1866246" cy="488825"/>
           </a:xfrm>
           <a:prstGeom prst="straightConnector1">
             <a:avLst/>
@@ -3462,8 +3523,8 @@
         </p:nvCxnSpPr>
         <p:spPr>
           <a:xfrm flipH="1">
-            <a:off x="3752850" y="475965"/>
-            <a:ext cx="1016259" cy="229738"/>
+            <a:off x="2897713" y="394532"/>
+            <a:ext cx="679747" cy="145931"/>
           </a:xfrm>
           <a:prstGeom prst="straightConnector1">
             <a:avLst/>
@@ -3507,8 +3568,8 @@
         </p:nvCxnSpPr>
         <p:spPr>
           <a:xfrm flipV="1">
-            <a:off x="7060452" y="1904247"/>
-            <a:ext cx="2655048" cy="1730130"/>
+            <a:off x="5227880" y="1375167"/>
+            <a:ext cx="1822395" cy="1219029"/>
           </a:xfrm>
           <a:prstGeom prst="straightConnector1">
             <a:avLst/>
@@ -3552,8 +3613,8 @@
         </p:nvCxnSpPr>
         <p:spPr>
           <a:xfrm flipH="1">
-            <a:off x="1605272" y="3634377"/>
-            <a:ext cx="3105241" cy="35166"/>
+            <a:off x="1402080" y="2594196"/>
+            <a:ext cx="2135912" cy="10371"/>
           </a:xfrm>
           <a:prstGeom prst="straightConnector1">
             <a:avLst/>
@@ -3594,8 +3655,8 @@
         </p:nvSpPr>
         <p:spPr>
           <a:xfrm>
-            <a:off x="4236240" y="1465379"/>
-            <a:ext cx="1184057" cy="369332"/>
+            <a:off x="3234355" y="1069524"/>
+            <a:ext cx="824612" cy="285335"/>
           </a:xfrm>
           <a:prstGeom prst="rect">
             <a:avLst/>
@@ -3610,7 +3671,7 @@
           </a:bodyPr>
           <a:lstStyle/>
           <a:p>
-            <a:endParaRPr lang="en-US" dirty="0"/>
+            <a:endParaRPr lang="en-US" sz="1254" dirty="0"/>
           </a:p>
         </p:txBody>
       </p:sp>
@@ -3628,8 +3689,8 @@
         </p:nvSpPr>
         <p:spPr>
           <a:xfrm>
-            <a:off x="1883251" y="3128216"/>
-            <a:ext cx="455030" cy="191396"/>
+            <a:off x="1595665" y="2227567"/>
+            <a:ext cx="316896" cy="133294"/>
           </a:xfrm>
           <a:prstGeom prst="ellipse">
             <a:avLst/>
@@ -3657,7 +3718,7 @@
           <a:lstStyle/>
           <a:p>
             <a:pPr algn="ctr"/>
-            <a:endParaRPr lang="en-US">
+            <a:endParaRPr lang="en-US" sz="1254">
               <a:noFill/>
             </a:endParaRPr>
           </a:p>
@@ -3677,8 +3738,8 @@
         </p:nvSpPr>
         <p:spPr>
           <a:xfrm>
-            <a:off x="10134600" y="1688221"/>
-            <a:ext cx="400334" cy="368697"/>
+            <a:off x="7342142" y="1224712"/>
+            <a:ext cx="278804" cy="256772"/>
           </a:xfrm>
           <a:prstGeom prst="ellipse">
             <a:avLst/>
@@ -3706,9 +3767,289 @@
           <a:lstStyle/>
           <a:p>
             <a:pPr algn="ctr"/>
-            <a:endParaRPr lang="en-US">
+            <a:endParaRPr lang="en-US" sz="1254">
               <a:noFill/>
             </a:endParaRPr>
+          </a:p>
+        </p:txBody>
+      </p:sp>
+      <p:sp>
+        <p:nvSpPr>
+          <p:cNvPr id="6" name="TextBox 5">
+            <a:extLst>
+              <a:ext uri="{FF2B5EF4-FFF2-40B4-BE49-F238E27FC236}">
+                <a16:creationId xmlns:a16="http://schemas.microsoft.com/office/drawing/2014/main" id="{2F20E63A-4E42-5AC0-D38F-64396CFE487B}"/>
+              </a:ext>
+            </a:extLst>
+          </p:cNvPr>
+          <p:cNvSpPr txBox="1"/>
+          <p:nvPr/>
+        </p:nvSpPr>
+        <p:spPr>
+          <a:xfrm>
+            <a:off x="3306986" y="1299943"/>
+            <a:ext cx="565495" cy="285335"/>
+          </a:xfrm>
+          <a:prstGeom prst="rect">
+            <a:avLst/>
+          </a:prstGeom>
+          <a:solidFill>
+            <a:schemeClr val="bg1"/>
+          </a:solidFill>
+        </p:spPr>
+        <p:txBody>
+          <a:bodyPr wrap="square" rtlCol="0">
+            <a:spAutoFit/>
+          </a:bodyPr>
+          <a:lstStyle/>
+          <a:p>
+            <a:endParaRPr lang="en-US" sz="1254" dirty="0"/>
+          </a:p>
+        </p:txBody>
+      </p:sp>
+      <p:sp>
+        <p:nvSpPr>
+          <p:cNvPr id="9" name="TextBox 8">
+            <a:extLst>
+              <a:ext uri="{FF2B5EF4-FFF2-40B4-BE49-F238E27FC236}">
+                <a16:creationId xmlns:a16="http://schemas.microsoft.com/office/drawing/2014/main" id="{56D38771-6283-57A9-7F8C-CA003A9F6E56}"/>
+              </a:ext>
+            </a:extLst>
+          </p:cNvPr>
+          <p:cNvSpPr txBox="1"/>
+          <p:nvPr/>
+        </p:nvSpPr>
+        <p:spPr>
+          <a:xfrm>
+            <a:off x="8254573" y="1075265"/>
+            <a:ext cx="672467" cy="285335"/>
+          </a:xfrm>
+          <a:prstGeom prst="rect">
+            <a:avLst/>
+          </a:prstGeom>
+          <a:solidFill>
+            <a:schemeClr val="bg1"/>
+          </a:solidFill>
+        </p:spPr>
+        <p:txBody>
+          <a:bodyPr wrap="square" rtlCol="0">
+            <a:spAutoFit/>
+          </a:bodyPr>
+          <a:lstStyle/>
+          <a:p>
+            <a:endParaRPr lang="en-US" sz="1254" dirty="0"/>
+          </a:p>
+        </p:txBody>
+      </p:sp>
+      <p:sp>
+        <p:nvSpPr>
+          <p:cNvPr id="16" name="TextBox 15">
+            <a:extLst>
+              <a:ext uri="{FF2B5EF4-FFF2-40B4-BE49-F238E27FC236}">
+                <a16:creationId xmlns:a16="http://schemas.microsoft.com/office/drawing/2014/main" id="{961CEB98-00FB-F525-286E-A98203BC890A}"/>
+              </a:ext>
+            </a:extLst>
+          </p:cNvPr>
+          <p:cNvSpPr txBox="1"/>
+          <p:nvPr/>
+        </p:nvSpPr>
+        <p:spPr>
+          <a:xfrm>
+            <a:off x="331878" y="48985"/>
+            <a:ext cx="351378" cy="263918"/>
+          </a:xfrm>
+          <a:prstGeom prst="rect">
+            <a:avLst/>
+          </a:prstGeom>
+          <a:noFill/>
+        </p:spPr>
+        <p:txBody>
+          <a:bodyPr wrap="none" rtlCol="0">
+            <a:spAutoFit/>
+          </a:bodyPr>
+          <a:lstStyle/>
+          <a:p>
+            <a:pPr algn="ctr"/>
+            <a:r>
+              <a:rPr lang="en-US" sz="1115" dirty="0"/>
+              <a:t>A.)</a:t>
+            </a:r>
+          </a:p>
+        </p:txBody>
+      </p:sp>
+      <p:sp>
+        <p:nvSpPr>
+          <p:cNvPr id="24" name="TextBox 23">
+            <a:extLst>
+              <a:ext uri="{FF2B5EF4-FFF2-40B4-BE49-F238E27FC236}">
+                <a16:creationId xmlns:a16="http://schemas.microsoft.com/office/drawing/2014/main" id="{4D492C43-04FB-511D-505B-D3869A499833}"/>
+              </a:ext>
+            </a:extLst>
+          </p:cNvPr>
+          <p:cNvSpPr txBox="1"/>
+          <p:nvPr/>
+        </p:nvSpPr>
+        <p:spPr>
+          <a:xfrm>
+            <a:off x="5418139" y="48985"/>
+            <a:ext cx="352981" cy="263918"/>
+          </a:xfrm>
+          <a:prstGeom prst="rect">
+            <a:avLst/>
+          </a:prstGeom>
+          <a:noFill/>
+        </p:spPr>
+        <p:txBody>
+          <a:bodyPr wrap="none" rtlCol="0">
+            <a:spAutoFit/>
+          </a:bodyPr>
+          <a:lstStyle/>
+          <a:p>
+            <a:pPr algn="ctr"/>
+            <a:r>
+              <a:rPr lang="en-US" sz="1115" dirty="0"/>
+              <a:t>B.)</a:t>
+            </a:r>
+          </a:p>
+        </p:txBody>
+      </p:sp>
+      <p:sp>
+        <p:nvSpPr>
+          <p:cNvPr id="3" name="TextBox 2">
+            <a:extLst>
+              <a:ext uri="{FF2B5EF4-FFF2-40B4-BE49-F238E27FC236}">
+                <a16:creationId xmlns:a16="http://schemas.microsoft.com/office/drawing/2014/main" id="{A314F0BD-49D6-DA97-AC77-337BE126FBD7}"/>
+              </a:ext>
+            </a:extLst>
+          </p:cNvPr>
+          <p:cNvSpPr txBox="1"/>
+          <p:nvPr/>
+        </p:nvSpPr>
+        <p:spPr>
+          <a:xfrm>
+            <a:off x="551586" y="3319387"/>
+            <a:ext cx="365806" cy="263918"/>
+          </a:xfrm>
+          <a:prstGeom prst="rect">
+            <a:avLst/>
+          </a:prstGeom>
+          <a:noFill/>
+        </p:spPr>
+        <p:txBody>
+          <a:bodyPr wrap="none" rtlCol="0">
+            <a:spAutoFit/>
+          </a:bodyPr>
+          <a:lstStyle/>
+          <a:p>
+            <a:pPr algn="ctr"/>
+            <a:r>
+              <a:rPr lang="en-US" sz="1115" dirty="0"/>
+              <a:t>C.)</a:t>
+            </a:r>
+          </a:p>
+        </p:txBody>
+      </p:sp>
+      <p:sp>
+        <p:nvSpPr>
+          <p:cNvPr id="4" name="TextBox 3">
+            <a:extLst>
+              <a:ext uri="{FF2B5EF4-FFF2-40B4-BE49-F238E27FC236}">
+                <a16:creationId xmlns:a16="http://schemas.microsoft.com/office/drawing/2014/main" id="{465C8504-0575-0122-50F0-5D2AC0BA155A}"/>
+              </a:ext>
+            </a:extLst>
+          </p:cNvPr>
+          <p:cNvSpPr txBox="1"/>
+          <p:nvPr/>
+        </p:nvSpPr>
+        <p:spPr>
+          <a:xfrm>
+            <a:off x="5164391" y="3319387"/>
+            <a:ext cx="364202" cy="263918"/>
+          </a:xfrm>
+          <a:prstGeom prst="rect">
+            <a:avLst/>
+          </a:prstGeom>
+          <a:noFill/>
+        </p:spPr>
+        <p:txBody>
+          <a:bodyPr wrap="none" rtlCol="0">
+            <a:spAutoFit/>
+          </a:bodyPr>
+          <a:lstStyle/>
+          <a:p>
+            <a:pPr algn="ctr"/>
+            <a:r>
+              <a:rPr lang="en-US" sz="1115" dirty="0"/>
+              <a:t>D.)</a:t>
+            </a:r>
+          </a:p>
+        </p:txBody>
+      </p:sp>
+      <p:sp>
+        <p:nvSpPr>
+          <p:cNvPr id="7" name="TextBox 6">
+            <a:extLst>
+              <a:ext uri="{FF2B5EF4-FFF2-40B4-BE49-F238E27FC236}">
+                <a16:creationId xmlns:a16="http://schemas.microsoft.com/office/drawing/2014/main" id="{E1C71F19-A8BA-2769-CEBF-DDCBD8A727F2}"/>
+              </a:ext>
+            </a:extLst>
+          </p:cNvPr>
+          <p:cNvSpPr txBox="1"/>
+          <p:nvPr/>
+        </p:nvSpPr>
+        <p:spPr>
+          <a:xfrm>
+            <a:off x="8409055" y="1159685"/>
+            <a:ext cx="450823" cy="1190489"/>
+          </a:xfrm>
+          <a:prstGeom prst="rect">
+            <a:avLst/>
+          </a:prstGeom>
+          <a:solidFill>
+            <a:schemeClr val="bg1"/>
+          </a:solidFill>
+        </p:spPr>
+        <p:txBody>
+          <a:bodyPr wrap="square" rtlCol="0">
+            <a:spAutoFit/>
+          </a:bodyPr>
+          <a:lstStyle/>
+          <a:p>
+            <a:endParaRPr lang="en-US" dirty="0"/>
+          </a:p>
+        </p:txBody>
+      </p:sp>
+      <p:sp>
+        <p:nvSpPr>
+          <p:cNvPr id="10" name="TextBox 9">
+            <a:extLst>
+              <a:ext uri="{FF2B5EF4-FFF2-40B4-BE49-F238E27FC236}">
+                <a16:creationId xmlns:a16="http://schemas.microsoft.com/office/drawing/2014/main" id="{9604DF3B-6F95-36DE-D59B-E9342823B608}"/>
+              </a:ext>
+            </a:extLst>
+          </p:cNvPr>
+          <p:cNvSpPr txBox="1"/>
+          <p:nvPr/>
+        </p:nvSpPr>
+        <p:spPr>
+          <a:xfrm>
+            <a:off x="3278053" y="1046201"/>
+            <a:ext cx="450823" cy="1190489"/>
+          </a:xfrm>
+          <a:prstGeom prst="rect">
+            <a:avLst/>
+          </a:prstGeom>
+          <a:solidFill>
+            <a:schemeClr val="bg1"/>
+          </a:solidFill>
+        </p:spPr>
+        <p:txBody>
+          <a:bodyPr wrap="square" rtlCol="0">
+            <a:spAutoFit/>
+          </a:bodyPr>
+          <a:lstStyle/>
+          <a:p>
+            <a:endParaRPr lang="en-US" dirty="0"/>
           </a:p>
         </p:txBody>
       </p:sp>
